--- a/01_FoundationProjects/MFL10_Enocder_Motor_Target_Ticks/MFL10_Enocder_Motor_Target_Ticks.pptx
+++ b/01_FoundationProjects/MFL10_Enocder_Motor_Target_Ticks/MFL10_Enocder_Motor_Target_Ticks.pptx
@@ -266,7 +266,7 @@
           <a:p>
             <a:fld id="{375049E3-AEF5-412D-9F98-5201579F9569}" type="datetimeFigureOut">
               <a:rPr lang="en-GB" smtClean="0"/>
-              <a:t>26/12/2025</a:t>
+              <a:t>18/01/2026</a:t>
             </a:fld>
             <a:endParaRPr lang="en-GB"/>
           </a:p>
@@ -466,7 +466,7 @@
           <a:p>
             <a:fld id="{375049E3-AEF5-412D-9F98-5201579F9569}" type="datetimeFigureOut">
               <a:rPr lang="en-GB" smtClean="0"/>
-              <a:t>26/12/2025</a:t>
+              <a:t>18/01/2026</a:t>
             </a:fld>
             <a:endParaRPr lang="en-GB"/>
           </a:p>
@@ -676,7 +676,7 @@
           <a:p>
             <a:fld id="{375049E3-AEF5-412D-9F98-5201579F9569}" type="datetimeFigureOut">
               <a:rPr lang="en-GB" smtClean="0"/>
-              <a:t>26/12/2025</a:t>
+              <a:t>18/01/2026</a:t>
             </a:fld>
             <a:endParaRPr lang="en-GB"/>
           </a:p>
@@ -876,7 +876,7 @@
           <a:p>
             <a:fld id="{375049E3-AEF5-412D-9F98-5201579F9569}" type="datetimeFigureOut">
               <a:rPr lang="en-GB" smtClean="0"/>
-              <a:t>26/12/2025</a:t>
+              <a:t>18/01/2026</a:t>
             </a:fld>
             <a:endParaRPr lang="en-GB"/>
           </a:p>
@@ -1152,7 +1152,7 @@
           <a:p>
             <a:fld id="{375049E3-AEF5-412D-9F98-5201579F9569}" type="datetimeFigureOut">
               <a:rPr lang="en-GB" smtClean="0"/>
-              <a:t>26/12/2025</a:t>
+              <a:t>18/01/2026</a:t>
             </a:fld>
             <a:endParaRPr lang="en-GB"/>
           </a:p>
@@ -1420,7 +1420,7 @@
           <a:p>
             <a:fld id="{375049E3-AEF5-412D-9F98-5201579F9569}" type="datetimeFigureOut">
               <a:rPr lang="en-GB" smtClean="0"/>
-              <a:t>26/12/2025</a:t>
+              <a:t>18/01/2026</a:t>
             </a:fld>
             <a:endParaRPr lang="en-GB"/>
           </a:p>
@@ -1835,7 +1835,7 @@
           <a:p>
             <a:fld id="{375049E3-AEF5-412D-9F98-5201579F9569}" type="datetimeFigureOut">
               <a:rPr lang="en-GB" smtClean="0"/>
-              <a:t>26/12/2025</a:t>
+              <a:t>18/01/2026</a:t>
             </a:fld>
             <a:endParaRPr lang="en-GB"/>
           </a:p>
@@ -1977,7 +1977,7 @@
           <a:p>
             <a:fld id="{375049E3-AEF5-412D-9F98-5201579F9569}" type="datetimeFigureOut">
               <a:rPr lang="en-GB" smtClean="0"/>
-              <a:t>26/12/2025</a:t>
+              <a:t>18/01/2026</a:t>
             </a:fld>
             <a:endParaRPr lang="en-GB"/>
           </a:p>
@@ -2090,7 +2090,7 @@
           <a:p>
             <a:fld id="{375049E3-AEF5-412D-9F98-5201579F9569}" type="datetimeFigureOut">
               <a:rPr lang="en-GB" smtClean="0"/>
-              <a:t>26/12/2025</a:t>
+              <a:t>18/01/2026</a:t>
             </a:fld>
             <a:endParaRPr lang="en-GB"/>
           </a:p>
@@ -2403,7 +2403,7 @@
           <a:p>
             <a:fld id="{375049E3-AEF5-412D-9F98-5201579F9569}" type="datetimeFigureOut">
               <a:rPr lang="en-GB" smtClean="0"/>
-              <a:t>26/12/2025</a:t>
+              <a:t>18/01/2026</a:t>
             </a:fld>
             <a:endParaRPr lang="en-GB"/>
           </a:p>
@@ -2692,7 +2692,7 @@
           <a:p>
             <a:fld id="{375049E3-AEF5-412D-9F98-5201579F9569}" type="datetimeFigureOut">
               <a:rPr lang="en-GB" smtClean="0"/>
-              <a:t>26/12/2025</a:t>
+              <a:t>18/01/2026</a:t>
             </a:fld>
             <a:endParaRPr lang="en-GB"/>
           </a:p>
@@ -2935,7 +2935,7 @@
           <a:p>
             <a:fld id="{375049E3-AEF5-412D-9F98-5201579F9569}" type="datetimeFigureOut">
               <a:rPr lang="en-GB" smtClean="0"/>
-              <a:t>26/12/2025</a:t>
+              <a:t>18/01/2026</a:t>
             </a:fld>
             <a:endParaRPr lang="en-GB"/>
           </a:p>
@@ -4284,8 +4284,8 @@
         </p:nvSpPr>
         <p:spPr bwMode="auto">
           <a:xfrm>
-            <a:off x="5814823" y="2373959"/>
-            <a:ext cx="3883520" cy="1754326"/>
+            <a:off x="5814822" y="2373959"/>
+            <a:ext cx="4465319" cy="2031325"/>
           </a:xfrm>
           <a:prstGeom prst="rect">
             <a:avLst/>
@@ -4402,7 +4402,7 @@
             </a:pPr>
             <a:r>
               <a:rPr lang="en-GB" b="1" dirty="0"/>
-              <a:t>Code for Lesson MFL10 (MFL10.ino):</a:t>
+              <a:t>Code for Lesson MFL10 (MFL10_Enocder_Motor_Target_Ticks.ino):</a:t>
             </a:r>
           </a:p>
           <a:p>
@@ -4413,7 +4413,7 @@
               <a:rPr lang="en-GB" b="1" dirty="0">
                 <a:hlinkClick r:id="rId2"/>
               </a:rPr>
-              <a:t>https://github.com/info-zas/zas-robotics-motion/blob/main/01_FoundationProjects/MFL10/MFL10/MFL10.ino</a:t>
+              <a:t>https://github.com/info-zas/zas-robotics-motion/tree/main/01_FoundationProjects/MFL10_Enocder_Motor_Target_Ticks/MFL10_Enocder_Motor_Target_Ticks</a:t>
             </a:r>
             <a:endParaRPr lang="en-GB" b="1" dirty="0"/>
           </a:p>
@@ -4485,7 +4485,7 @@
           <a:p>
             <a:r>
               <a:rPr lang="en-GB" sz="1800" b="1" dirty="0"/>
-              <a:t>Execute the code (MFL09.ino) in the motion creative board</a:t>
+              <a:t>Execute the code in the motion creative board</a:t>
             </a:r>
           </a:p>
         </p:txBody>
@@ -4786,10 +4786,10 @@
       </p:sp>
       <p:sp>
         <p:nvSpPr>
-          <p:cNvPr id="4" name="TextBox 3">
-            <a:extLst>
-              <a:ext uri="{FF2B5EF4-FFF2-40B4-BE49-F238E27FC236}">
-                <a16:creationId xmlns:a16="http://schemas.microsoft.com/office/drawing/2014/main" id="{C75071A6-3F7E-220A-03F6-8C5902D03FC6}"/>
+          <p:cNvPr id="7" name="TextBox 6">
+            <a:extLst>
+              <a:ext uri="{FF2B5EF4-FFF2-40B4-BE49-F238E27FC236}">
+                <a16:creationId xmlns:a16="http://schemas.microsoft.com/office/drawing/2014/main" id="{CEE8D9EB-24B5-7334-8281-68DC667483E6}"/>
               </a:ext>
             </a:extLst>
           </p:cNvPr>
@@ -4798,8 +4798,8 @@
         </p:nvSpPr>
         <p:spPr bwMode="auto">
           <a:xfrm>
-            <a:off x="838200" y="2487426"/>
-            <a:ext cx="3883520" cy="1754326"/>
+            <a:off x="693234" y="2313246"/>
+            <a:ext cx="4465319" cy="2031325"/>
           </a:xfrm>
           <a:prstGeom prst="rect">
             <a:avLst/>
@@ -4916,7 +4916,7 @@
             </a:pPr>
             <a:r>
               <a:rPr lang="en-GB" b="1" dirty="0"/>
-              <a:t>Code for Lesson MFL10 (MFL10.ino):</a:t>
+              <a:t>Code for Lesson MFL10 (MFL10_Enocder_Motor_Target_Ticks.ino):</a:t>
             </a:r>
           </a:p>
           <a:p>
@@ -4927,7 +4927,7 @@
               <a:rPr lang="en-GB" b="1" dirty="0">
                 <a:hlinkClick r:id="rId4"/>
               </a:rPr>
-              <a:t>https://github.com/info-zas/zas-robotics-motion/blob/main/01_FoundationProjects/MFL10/MFL10/MFL10.ino</a:t>
+              <a:t>https://github.com/info-zas/zas-robotics-motion/tree/main/01_FoundationProjects/MFL10_Enocder_Motor_Target_Ticks/MFL10_Enocder_Motor_Target_Ticks</a:t>
             </a:r>
             <a:endParaRPr lang="en-GB" b="1" dirty="0"/>
           </a:p>
@@ -5193,7 +5193,7 @@
         <p:spPr bwMode="auto">
           <a:xfrm>
             <a:off x="838200" y="4346879"/>
-            <a:ext cx="4355337" cy="1477328"/>
+            <a:ext cx="4355337" cy="2031325"/>
           </a:xfrm>
           <a:prstGeom prst="rect">
             <a:avLst/>
@@ -5310,25 +5310,25 @@
             </a:pPr>
             <a:r>
               <a:rPr lang="en-GB" b="1" dirty="0"/>
-              <a:t>Code for Lesson MFL10_a (MFL10_a.ino):</a:t>
+              <a:t>Code for Lesson MFL10 (MFL10_Enocder_Motor_RPM.ino):</a:t>
             </a:r>
           </a:p>
           <a:p>
             <a:pPr>
               <a:defRPr/>
             </a:pPr>
+            <a:r>
+              <a:rPr lang="en-GB" b="1" dirty="0">
+                <a:hlinkClick r:id="rId2"/>
+              </a:rPr>
+              <a:t>https://github.com/info-zas/zas-robotics-motion/tree/main/01_FoundationProjects/MFL10_Enocder_Motor_Target_Ticks/MFL10_Enocder_Motor_RPM</a:t>
+            </a:r>
             <a:endParaRPr lang="en-GB" b="1" dirty="0"/>
           </a:p>
           <a:p>
             <a:pPr>
               <a:defRPr/>
             </a:pPr>
-            <a:r>
-              <a:rPr lang="en-GB" b="1" dirty="0">
-                <a:hlinkClick r:id="rId2"/>
-              </a:rPr>
-              <a:t>https://github.com/info-zas/zas-robotics-motion/blob/main/01_FoundationProjects/MFL10/MFL_10a/MFL_10a.ino</a:t>
-            </a:r>
             <a:endParaRPr lang="en-GB" b="1" dirty="0"/>
           </a:p>
         </p:txBody>
